--- a/slides/Claude_session2.pptx
+++ b/slides/Claude_session2.pptx
@@ -123,6 +123,2032 @@
     </a:lvl9pPr>
   </p:defaultTextStyle>
 </p:presentation>
+</file>
+
+<file path=ppt/notesMasters/notesMaster1.xml><?xml version="1.0" encoding="utf-8"?>
+<p:notesMaster xmlns:a="http://schemas.openxmlformats.org/drawingml/2006/main" xmlns:p="http://schemas.openxmlformats.org/presentationml/2006/main" xmlns:r="http://schemas.openxmlformats.org/officeDocument/2006/relationships">
+  <p:cSld>
+    <p:bg>
+      <p:bgRef idx="1001">
+        <a:schemeClr val="bg1"/>
+      </p:bgRef>
+    </p:bg>
+    <p:spTree>
+      <p:nvGrpSpPr>
+        <p:cNvPr id="1" name=""/>
+        <p:cNvGrpSpPr/>
+        <p:nvPr/>
+      </p:nvGrpSpPr>
+      <p:grpSpPr>
+        <a:xfrm>
+          <a:off x="0" y="0"/>
+          <a:ext cx="0" cy="0"/>
+          <a:chOff x="0" y="0"/>
+          <a:chExt cx="0" cy="0"/>
+        </a:xfrm>
+      </p:grpSpPr>
+      <p:sp>
+        <p:nvSpPr>
+          <p:cNvPr id="2" name="Header Placeholder 1"/>
+          <p:cNvSpPr>
+            <a:spLocks noGrp="1"/>
+          </p:cNvSpPr>
+          <p:nvPr>
+            <p:ph type="hdr" sz="quarter"/>
+          </p:nvPr>
+        </p:nvSpPr>
+        <p:spPr>
+          <a:xfrm>
+            <a:off x="0" y="0"/>
+            <a:ext cx="2971800" cy="457200"/>
+          </a:xfrm>
+          <a:prstGeom prst="rect">
+            <a:avLst/>
+          </a:prstGeom>
+        </p:spPr>
+        <p:txBody>
+          <a:bodyPr vert="horz" lIns="91440" tIns="45720" rIns="91440" bIns="45720" rtlCol="0"/>
+          <a:lstStyle>
+            <a:lvl1pPr algn="l">
+              <a:defRPr sz="1200"/>
+            </a:lvl1pPr>
+          </a:lstStyle>
+          <a:p>
+            <a:endParaRPr lang="en-US"/>
+          </a:p>
+        </p:txBody>
+      </p:sp>
+      <p:sp>
+        <p:nvSpPr>
+          <p:cNvPr id="3" name="Date Placeholder 2"/>
+          <p:cNvSpPr>
+            <a:spLocks noGrp="1"/>
+          </p:cNvSpPr>
+          <p:nvPr>
+            <p:ph type="dt" idx="1"/>
+          </p:nvPr>
+        </p:nvSpPr>
+        <p:spPr>
+          <a:xfrm>
+            <a:off x="3884613" y="0"/>
+            <a:ext cx="2971800" cy="457200"/>
+          </a:xfrm>
+          <a:prstGeom prst="rect">
+            <a:avLst/>
+          </a:prstGeom>
+        </p:spPr>
+        <p:txBody>
+          <a:bodyPr vert="horz" lIns="91440" tIns="45720" rIns="91440" bIns="45720" rtlCol="0"/>
+          <a:lstStyle>
+            <a:lvl1pPr algn="r">
+              <a:defRPr sz="1200"/>
+            </a:lvl1pPr>
+          </a:lstStyle>
+          <a:p>
+            <a:fld id="{0F89C1C7-3DCD-1040-A9CF-14679D8B5DDD}" type="datetimeFigureOut">
+              <a:rPr lang="en-US" smtClean="0"/>
+              <a:t>10/17/16</a:t>
+            </a:fld>
+            <a:endParaRPr lang="en-US"/>
+          </a:p>
+        </p:txBody>
+      </p:sp>
+      <p:sp>
+        <p:nvSpPr>
+          <p:cNvPr id="4" name="Slide Image Placeholder 3"/>
+          <p:cNvSpPr>
+            <a:spLocks noGrp="1" noRot="1" noChangeAspect="1"/>
+          </p:cNvSpPr>
+          <p:nvPr>
+            <p:ph type="sldImg" idx="2"/>
+          </p:nvPr>
+        </p:nvSpPr>
+        <p:spPr>
+          <a:xfrm>
+            <a:off x="1143000" y="685800"/>
+            <a:ext cx="4572000" cy="3429000"/>
+          </a:xfrm>
+          <a:prstGeom prst="rect">
+            <a:avLst/>
+          </a:prstGeom>
+          <a:noFill/>
+          <a:ln w="12700">
+            <a:solidFill>
+              <a:prstClr val="black"/>
+            </a:solidFill>
+          </a:ln>
+        </p:spPr>
+        <p:txBody>
+          <a:bodyPr vert="horz" lIns="91440" tIns="45720" rIns="91440" bIns="45720" rtlCol="0" anchor="ctr"/>
+          <a:lstStyle/>
+          <a:p>
+            <a:endParaRPr lang="en-US"/>
+          </a:p>
+        </p:txBody>
+      </p:sp>
+      <p:sp>
+        <p:nvSpPr>
+          <p:cNvPr id="5" name="Notes Placeholder 4"/>
+          <p:cNvSpPr>
+            <a:spLocks noGrp="1"/>
+          </p:cNvSpPr>
+          <p:nvPr>
+            <p:ph type="body" sz="quarter" idx="3"/>
+          </p:nvPr>
+        </p:nvSpPr>
+        <p:spPr>
+          <a:xfrm>
+            <a:off x="685800" y="4343400"/>
+            <a:ext cx="5486400" cy="4114800"/>
+          </a:xfrm>
+          <a:prstGeom prst="rect">
+            <a:avLst/>
+          </a:prstGeom>
+        </p:spPr>
+        <p:txBody>
+          <a:bodyPr vert="horz" lIns="91440" tIns="45720" rIns="91440" bIns="45720" rtlCol="0"/>
+          <a:lstStyle/>
+          <a:p>
+            <a:pPr lvl="0"/>
+            <a:r>
+              <a:rPr lang="en-US" smtClean="0"/>
+              <a:t>Click to edit Master text styles</a:t>
+            </a:r>
+          </a:p>
+          <a:p>
+            <a:pPr lvl="1"/>
+            <a:r>
+              <a:rPr lang="en-US" smtClean="0"/>
+              <a:t>Second level</a:t>
+            </a:r>
+          </a:p>
+          <a:p>
+            <a:pPr lvl="2"/>
+            <a:r>
+              <a:rPr lang="en-US" smtClean="0"/>
+              <a:t>Third level</a:t>
+            </a:r>
+          </a:p>
+          <a:p>
+            <a:pPr lvl="3"/>
+            <a:r>
+              <a:rPr lang="en-US" smtClean="0"/>
+              <a:t>Fourth level</a:t>
+            </a:r>
+          </a:p>
+          <a:p>
+            <a:pPr lvl="4"/>
+            <a:r>
+              <a:rPr lang="en-US" smtClean="0"/>
+              <a:t>Fifth level</a:t>
+            </a:r>
+            <a:endParaRPr lang="en-US"/>
+          </a:p>
+        </p:txBody>
+      </p:sp>
+      <p:sp>
+        <p:nvSpPr>
+          <p:cNvPr id="6" name="Footer Placeholder 5"/>
+          <p:cNvSpPr>
+            <a:spLocks noGrp="1"/>
+          </p:cNvSpPr>
+          <p:nvPr>
+            <p:ph type="ftr" sz="quarter" idx="4"/>
+          </p:nvPr>
+        </p:nvSpPr>
+        <p:spPr>
+          <a:xfrm>
+            <a:off x="0" y="8685213"/>
+            <a:ext cx="2971800" cy="457200"/>
+          </a:xfrm>
+          <a:prstGeom prst="rect">
+            <a:avLst/>
+          </a:prstGeom>
+        </p:spPr>
+        <p:txBody>
+          <a:bodyPr vert="horz" lIns="91440" tIns="45720" rIns="91440" bIns="45720" rtlCol="0" anchor="b"/>
+          <a:lstStyle>
+            <a:lvl1pPr algn="l">
+              <a:defRPr sz="1200"/>
+            </a:lvl1pPr>
+          </a:lstStyle>
+          <a:p>
+            <a:endParaRPr lang="en-US"/>
+          </a:p>
+        </p:txBody>
+      </p:sp>
+      <p:sp>
+        <p:nvSpPr>
+          <p:cNvPr id="7" name="Slide Number Placeholder 6"/>
+          <p:cNvSpPr>
+            <a:spLocks noGrp="1"/>
+          </p:cNvSpPr>
+          <p:nvPr>
+            <p:ph type="sldNum" sz="quarter" idx="5"/>
+          </p:nvPr>
+        </p:nvSpPr>
+        <p:spPr>
+          <a:xfrm>
+            <a:off x="3884613" y="8685213"/>
+            <a:ext cx="2971800" cy="457200"/>
+          </a:xfrm>
+          <a:prstGeom prst="rect">
+            <a:avLst/>
+          </a:prstGeom>
+        </p:spPr>
+        <p:txBody>
+          <a:bodyPr vert="horz" lIns="91440" tIns="45720" rIns="91440" bIns="45720" rtlCol="0" anchor="b"/>
+          <a:lstStyle>
+            <a:lvl1pPr algn="r">
+              <a:defRPr sz="1200"/>
+            </a:lvl1pPr>
+          </a:lstStyle>
+          <a:p>
+            <a:fld id="{BB5E49A5-4136-284D-997B-48E1D791AD67}" type="slidenum">
+              <a:rPr lang="en-US" smtClean="0"/>
+              <a:t>‹#›</a:t>
+            </a:fld>
+            <a:endParaRPr lang="en-US"/>
+          </a:p>
+        </p:txBody>
+      </p:sp>
+    </p:spTree>
+    <p:extLst>
+      <p:ext uri="{BB962C8B-B14F-4D97-AF65-F5344CB8AC3E}">
+        <p14:creationId xmlns:p14="http://schemas.microsoft.com/office/powerpoint/2010/main" val="2623252185"/>
+      </p:ext>
+    </p:extLst>
+  </p:cSld>
+  <p:clrMap bg1="lt1" tx1="dk1" bg2="lt2" tx2="dk2" accent1="accent1" accent2="accent2" accent3="accent3" accent4="accent4" accent5="accent5" accent6="accent6" hlink="hlink" folHlink="folHlink"/>
+  <p:notesStyle>
+    <a:lvl1pPr marL="0" algn="l" defTabSz="457200" rtl="0" eaLnBrk="1" latinLnBrk="0" hangingPunct="1">
+      <a:defRPr sz="1200" kern="1200">
+        <a:solidFill>
+          <a:schemeClr val="tx1"/>
+        </a:solidFill>
+        <a:latin typeface="+mn-lt"/>
+        <a:ea typeface="+mn-ea"/>
+        <a:cs typeface="+mn-cs"/>
+      </a:defRPr>
+    </a:lvl1pPr>
+    <a:lvl2pPr marL="457200" algn="l" defTabSz="457200" rtl="0" eaLnBrk="1" latinLnBrk="0" hangingPunct="1">
+      <a:defRPr sz="1200" kern="1200">
+        <a:solidFill>
+          <a:schemeClr val="tx1"/>
+        </a:solidFill>
+        <a:latin typeface="+mn-lt"/>
+        <a:ea typeface="+mn-ea"/>
+        <a:cs typeface="+mn-cs"/>
+      </a:defRPr>
+    </a:lvl2pPr>
+    <a:lvl3pPr marL="914400" algn="l" defTabSz="457200" rtl="0" eaLnBrk="1" latinLnBrk="0" hangingPunct="1">
+      <a:defRPr sz="1200" kern="1200">
+        <a:solidFill>
+          <a:schemeClr val="tx1"/>
+        </a:solidFill>
+        <a:latin typeface="+mn-lt"/>
+        <a:ea typeface="+mn-ea"/>
+        <a:cs typeface="+mn-cs"/>
+      </a:defRPr>
+    </a:lvl3pPr>
+    <a:lvl4pPr marL="1371600" algn="l" defTabSz="457200" rtl="0" eaLnBrk="1" latinLnBrk="0" hangingPunct="1">
+      <a:defRPr sz="1200" kern="1200">
+        <a:solidFill>
+          <a:schemeClr val="tx1"/>
+        </a:solidFill>
+        <a:latin typeface="+mn-lt"/>
+        <a:ea typeface="+mn-ea"/>
+        <a:cs typeface="+mn-cs"/>
+      </a:defRPr>
+    </a:lvl4pPr>
+    <a:lvl5pPr marL="1828800" algn="l" defTabSz="457200" rtl="0" eaLnBrk="1" latinLnBrk="0" hangingPunct="1">
+      <a:defRPr sz="1200" kern="1200">
+        <a:solidFill>
+          <a:schemeClr val="tx1"/>
+        </a:solidFill>
+        <a:latin typeface="+mn-lt"/>
+        <a:ea typeface="+mn-ea"/>
+        <a:cs typeface="+mn-cs"/>
+      </a:defRPr>
+    </a:lvl5pPr>
+    <a:lvl6pPr marL="2286000" algn="l" defTabSz="457200" rtl="0" eaLnBrk="1" latinLnBrk="0" hangingPunct="1">
+      <a:defRPr sz="1200" kern="1200">
+        <a:solidFill>
+          <a:schemeClr val="tx1"/>
+        </a:solidFill>
+        <a:latin typeface="+mn-lt"/>
+        <a:ea typeface="+mn-ea"/>
+        <a:cs typeface="+mn-cs"/>
+      </a:defRPr>
+    </a:lvl6pPr>
+    <a:lvl7pPr marL="2743200" algn="l" defTabSz="457200" rtl="0" eaLnBrk="1" latinLnBrk="0" hangingPunct="1">
+      <a:defRPr sz="1200" kern="1200">
+        <a:solidFill>
+          <a:schemeClr val="tx1"/>
+        </a:solidFill>
+        <a:latin typeface="+mn-lt"/>
+        <a:ea typeface="+mn-ea"/>
+        <a:cs typeface="+mn-cs"/>
+      </a:defRPr>
+    </a:lvl7pPr>
+    <a:lvl8pPr marL="3200400" algn="l" defTabSz="457200" rtl="0" eaLnBrk="1" latinLnBrk="0" hangingPunct="1">
+      <a:defRPr sz="1200" kern="1200">
+        <a:solidFill>
+          <a:schemeClr val="tx1"/>
+        </a:solidFill>
+        <a:latin typeface="+mn-lt"/>
+        <a:ea typeface="+mn-ea"/>
+        <a:cs typeface="+mn-cs"/>
+      </a:defRPr>
+    </a:lvl8pPr>
+    <a:lvl9pPr marL="3657600" algn="l" defTabSz="457200" rtl="0" eaLnBrk="1" latinLnBrk="0" hangingPunct="1">
+      <a:defRPr sz="1200" kern="1200">
+        <a:solidFill>
+          <a:schemeClr val="tx1"/>
+        </a:solidFill>
+        <a:latin typeface="+mn-lt"/>
+        <a:ea typeface="+mn-ea"/>
+        <a:cs typeface="+mn-cs"/>
+      </a:defRPr>
+    </a:lvl9pPr>
+  </p:notesStyle>
+</p:notesMaster>
+</file>
+
+<file path=ppt/notesSlides/notesSlide1.xml><?xml version="1.0" encoding="utf-8"?>
+<p:notes xmlns:a="http://schemas.openxmlformats.org/drawingml/2006/main" xmlns:p="http://schemas.openxmlformats.org/presentationml/2006/main" xmlns:r="http://schemas.openxmlformats.org/officeDocument/2006/relationships">
+  <p:cSld>
+    <p:spTree>
+      <p:nvGrpSpPr>
+        <p:cNvPr id="1" name=""/>
+        <p:cNvGrpSpPr/>
+        <p:nvPr/>
+      </p:nvGrpSpPr>
+      <p:grpSpPr>
+        <a:xfrm>
+          <a:off x="0" y="0"/>
+          <a:ext cx="0" cy="0"/>
+          <a:chOff x="0" y="0"/>
+          <a:chExt cx="0" cy="0"/>
+        </a:xfrm>
+      </p:grpSpPr>
+      <p:sp>
+        <p:nvSpPr>
+          <p:cNvPr id="2" name="Slide Image Placeholder 1"/>
+          <p:cNvSpPr>
+            <a:spLocks noGrp="1"/>
+          </p:cNvSpPr>
+          <p:nvPr>
+            <p:ph type="sldImg" idx="2"/>
+          </p:nvPr>
+        </p:nvSpPr>
+        <p:spPr/>
+      </p:sp>
+      <p:sp>
+        <p:nvSpPr>
+          <p:cNvPr id="3" name="Notes Placeholder 2"/>
+          <p:cNvSpPr>
+            <a:spLocks noGrp="1"/>
+          </p:cNvSpPr>
+          <p:nvPr>
+            <p:ph type="body" idx="3" sz="quarter"/>
+          </p:nvPr>
+        </p:nvSpPr>
+        <p:spPr/>
+        <p:txBody>
+          <a:bodyPr/>
+          <a:lstStyle/>
+          <a:p>
+            <a:r>
+              <a:t>では第2回を始めます。</a:t>
+            </a:r>
+          </a:p>
+          <a:p>
+            <a:r>
+              <a:t>今回は「プロジェクトに定着させる」というテーマです。</a:t>
+            </a:r>
+          </a:p>
+          <a:p>
+            <a:r>
+              <a:t>前回は基本操作とコミュニケーションの心得でした。今回は、自分のプロジェクトにClaude Codeを定着させるための設定やカスタマイズの話です。</a:t>
+            </a:r>
+          </a:p>
+        </p:txBody>
+      </p:sp>
+      <p:sp>
+        <p:nvSpPr>
+          <p:cNvPr id="4" name="Slide Number Placeholder 3"/>
+          <p:cNvSpPr>
+            <a:spLocks noGrp="1"/>
+          </p:cNvSpPr>
+          <p:nvPr>
+            <p:ph type="sldNum" idx="5" sz="quarter"/>
+          </p:nvPr>
+        </p:nvSpPr>
+        <p:spPr/>
+      </p:sp>
+    </p:spTree>
+  </p:cSld>
+  <p:clrMapOvr>
+    <a:masterClrMapping/>
+  </p:clrMapOvr>
+</p:notes>
+</file>
+
+<file path=ppt/notesSlides/notesSlide10.xml><?xml version="1.0" encoding="utf-8"?>
+<p:notes xmlns:a="http://schemas.openxmlformats.org/drawingml/2006/main" xmlns:p="http://schemas.openxmlformats.org/presentationml/2006/main" xmlns:r="http://schemas.openxmlformats.org/officeDocument/2006/relationships">
+  <p:cSld>
+    <p:spTree>
+      <p:nvGrpSpPr>
+        <p:cNvPr id="1" name=""/>
+        <p:cNvGrpSpPr/>
+        <p:nvPr/>
+      </p:nvGrpSpPr>
+      <p:grpSpPr>
+        <a:xfrm>
+          <a:off x="0" y="0"/>
+          <a:ext cx="0" cy="0"/>
+          <a:chOff x="0" y="0"/>
+          <a:chExt cx="0" cy="0"/>
+        </a:xfrm>
+      </p:grpSpPr>
+      <p:sp>
+        <p:nvSpPr>
+          <p:cNvPr id="2" name="Slide Image Placeholder 1"/>
+          <p:cNvSpPr>
+            <a:spLocks noGrp="1"/>
+          </p:cNvSpPr>
+          <p:nvPr>
+            <p:ph type="sldImg" idx="2"/>
+          </p:nvPr>
+        </p:nvSpPr>
+        <p:spPr/>
+      </p:sp>
+      <p:sp>
+        <p:nvSpPr>
+          <p:cNvPr id="3" name="Notes Placeholder 2"/>
+          <p:cNvSpPr>
+            <a:spLocks noGrp="1"/>
+          </p:cNvSpPr>
+          <p:nvPr>
+            <p:ph type="body" idx="3" sz="quarter"/>
+          </p:nvPr>
+        </p:nvSpPr>
+        <p:spPr/>
+        <p:txBody>
+          <a:bodyPr/>
+          <a:lstStyle/>
+          <a:p>
+            <a:r>
+              <a:t>PART 1のまとめです。</a:t>
+            </a:r>
+          </a:p>
+          <a:p>
+            <a:r>
+              <a:t>コンテキストウィンドウの仕組みを理解して、CLAUDE.mdを活用する。これだけでClaude Codeの動きが大きく変わります。</a:t>
+            </a:r>
+          </a:p>
+          <a:p/>
+          <a:p>
+            <a:r>
+              <a:t>チェックリストとして、プロジェクト開始時、セッション開始時、作業中、定期的に、それぞれやることをまとめました。</a:t>
+            </a:r>
+          </a:p>
+          <a:p/>
+          <a:p>
+            <a:r>
+              <a:t>コンテキストを制するものが、Claude Codeを制する。大げさですが、それくらい重要な基盤です。</a:t>
+            </a:r>
+          </a:p>
+        </p:txBody>
+      </p:sp>
+      <p:sp>
+        <p:nvSpPr>
+          <p:cNvPr id="4" name="Slide Number Placeholder 3"/>
+          <p:cNvSpPr>
+            <a:spLocks noGrp="1"/>
+          </p:cNvSpPr>
+          <p:nvPr>
+            <p:ph type="sldNum" idx="5" sz="quarter"/>
+          </p:nvPr>
+        </p:nvSpPr>
+        <p:spPr/>
+      </p:sp>
+    </p:spTree>
+  </p:cSld>
+  <p:clrMapOvr>
+    <a:masterClrMapping/>
+  </p:clrMapOvr>
+</p:notes>
+</file>
+
+<file path=ppt/notesSlides/notesSlide11.xml><?xml version="1.0" encoding="utf-8"?>
+<p:notes xmlns:a="http://schemas.openxmlformats.org/drawingml/2006/main" xmlns:p="http://schemas.openxmlformats.org/presentationml/2006/main" xmlns:r="http://schemas.openxmlformats.org/officeDocument/2006/relationships">
+  <p:cSld>
+    <p:spTree>
+      <p:nvGrpSpPr>
+        <p:cNvPr id="1" name=""/>
+        <p:cNvGrpSpPr/>
+        <p:nvPr/>
+      </p:nvGrpSpPr>
+      <p:grpSpPr>
+        <a:xfrm>
+          <a:off x="0" y="0"/>
+          <a:ext cx="0" cy="0"/>
+          <a:chOff x="0" y="0"/>
+          <a:chExt cx="0" cy="0"/>
+        </a:xfrm>
+      </p:grpSpPr>
+      <p:sp>
+        <p:nvSpPr>
+          <p:cNvPr id="2" name="Slide Image Placeholder 1"/>
+          <p:cNvSpPr>
+            <a:spLocks noGrp="1"/>
+          </p:cNvSpPr>
+          <p:nvPr>
+            <p:ph type="sldImg" idx="2"/>
+          </p:nvPr>
+        </p:nvSpPr>
+        <p:spPr/>
+      </p:sp>
+      <p:sp>
+        <p:nvSpPr>
+          <p:cNvPr id="3" name="Notes Placeholder 2"/>
+          <p:cNvSpPr>
+            <a:spLocks noGrp="1"/>
+          </p:cNvSpPr>
+          <p:nvPr>
+            <p:ph type="body" idx="3" sz="quarter"/>
+          </p:nvPr>
+        </p:nvSpPr>
+        <p:spPr/>
+        <p:txBody>
+          <a:bodyPr/>
+          <a:lstStyle/>
+          <a:p>
+            <a:r>
+              <a:t>PART 2、スラッシュコマンドとSkillsです。</a:t>
+            </a:r>
+          </a:p>
+          <a:p>
+            <a:r>
+              <a:t>「同じ指示、何度も書かない」がテーマ。</a:t>
+            </a:r>
+          </a:p>
+          <a:p/>
+          <a:p>
+            <a:r>
+              <a:t>CLAUDE.mdでプロジェクトの基本情報を教えましたが、特定の作業手順はどうするか。それがスラッシュコマンドとSkillsの役割です。</a:t>
+            </a:r>
+          </a:p>
+        </p:txBody>
+      </p:sp>
+      <p:sp>
+        <p:nvSpPr>
+          <p:cNvPr id="4" name="Slide Number Placeholder 3"/>
+          <p:cNvSpPr>
+            <a:spLocks noGrp="1"/>
+          </p:cNvSpPr>
+          <p:nvPr>
+            <p:ph type="sldNum" idx="5" sz="quarter"/>
+          </p:nvPr>
+        </p:nvSpPr>
+        <p:spPr/>
+      </p:sp>
+    </p:spTree>
+  </p:cSld>
+  <p:clrMapOvr>
+    <a:masterClrMapping/>
+  </p:clrMapOvr>
+</p:notes>
+</file>
+
+<file path=ppt/notesSlides/notesSlide12.xml><?xml version="1.0" encoding="utf-8"?>
+<p:notes xmlns:a="http://schemas.openxmlformats.org/drawingml/2006/main" xmlns:p="http://schemas.openxmlformats.org/presentationml/2006/main" xmlns:r="http://schemas.openxmlformats.org/officeDocument/2006/relationships">
+  <p:cSld>
+    <p:spTree>
+      <p:nvGrpSpPr>
+        <p:cNvPr id="1" name=""/>
+        <p:cNvGrpSpPr/>
+        <p:nvPr/>
+      </p:nvGrpSpPr>
+      <p:grpSpPr>
+        <a:xfrm>
+          <a:off x="0" y="0"/>
+          <a:ext cx="0" cy="0"/>
+          <a:chOff x="0" y="0"/>
+          <a:chExt cx="0" cy="0"/>
+        </a:xfrm>
+      </p:grpSpPr>
+      <p:sp>
+        <p:nvSpPr>
+          <p:cNvPr id="2" name="Slide Image Placeholder 1"/>
+          <p:cNvSpPr>
+            <a:spLocks noGrp="1"/>
+          </p:cNvSpPr>
+          <p:nvPr>
+            <p:ph type="sldImg" idx="2"/>
+          </p:nvPr>
+        </p:nvSpPr>
+        <p:spPr/>
+      </p:sp>
+      <p:sp>
+        <p:nvSpPr>
+          <p:cNvPr id="3" name="Notes Placeholder 2"/>
+          <p:cNvSpPr>
+            <a:spLocks noGrp="1"/>
+          </p:cNvSpPr>
+          <p:nvPr>
+            <p:ph type="body" idx="3" sz="quarter"/>
+          </p:nvPr>
+        </p:nvSpPr>
+        <p:spPr/>
+        <p:txBody>
+          <a:bodyPr/>
+          <a:lstStyle/>
+          <a:p>
+            <a:r>
+              <a:t>まず組み込みのスラッシュコマンドから。セッション中に / を入力すると候補が表示されます。</a:t>
+            </a:r>
+          </a:p>
+          <a:p/>
+          <a:p>
+            <a:r>
+              <a:t>特によく使うのは /clear と /init。PART 1でも紹介しましたが、ここで改めて整理します。</a:t>
+            </a:r>
+          </a:p>
+          <a:p/>
+          <a:p>
+            <a:r>
+              <a:t>/compact は手動でコンテキストを圧縮するコマンドです。自動のコンパクトを待たずに自分のタイミングで実行できます。</a:t>
+            </a:r>
+          </a:p>
+          <a:p/>
+          <a:p>
+            <a:r>
+              <a:t>/insights は使い方の改善提案を出してくれる機能です。CLAUDE.mdに追加すべき内容を具体的な文章で提案してくれるので、そのままコピーして貼り付けられます。作成すべきスキルやHooksまで提案対象に含まれます。</a:t>
+            </a:r>
+          </a:p>
+        </p:txBody>
+      </p:sp>
+      <p:sp>
+        <p:nvSpPr>
+          <p:cNvPr id="4" name="Slide Number Placeholder 3"/>
+          <p:cNvSpPr>
+            <a:spLocks noGrp="1"/>
+          </p:cNvSpPr>
+          <p:nvPr>
+            <p:ph type="sldNum" idx="5" sz="quarter"/>
+          </p:nvPr>
+        </p:nvSpPr>
+        <p:spPr/>
+      </p:sp>
+    </p:spTree>
+  </p:cSld>
+  <p:clrMapOvr>
+    <a:masterClrMapping/>
+  </p:clrMapOvr>
+</p:notes>
+</file>
+
+<file path=ppt/notesSlides/notesSlide13.xml><?xml version="1.0" encoding="utf-8"?>
+<p:notes xmlns:a="http://schemas.openxmlformats.org/drawingml/2006/main" xmlns:p="http://schemas.openxmlformats.org/presentationml/2006/main" xmlns:r="http://schemas.openxmlformats.org/officeDocument/2006/relationships">
+  <p:cSld>
+    <p:spTree>
+      <p:nvGrpSpPr>
+        <p:cNvPr id="1" name=""/>
+        <p:cNvGrpSpPr/>
+        <p:nvPr/>
+      </p:nvGrpSpPr>
+      <p:grpSpPr>
+        <a:xfrm>
+          <a:off x="0" y="0"/>
+          <a:ext cx="0" cy="0"/>
+          <a:chOff x="0" y="0"/>
+          <a:chExt cx="0" cy="0"/>
+        </a:xfrm>
+      </p:grpSpPr>
+      <p:sp>
+        <p:nvSpPr>
+          <p:cNvPr id="2" name="Slide Image Placeholder 1"/>
+          <p:cNvSpPr>
+            <a:spLocks noGrp="1"/>
+          </p:cNvSpPr>
+          <p:nvPr>
+            <p:ph type="sldImg" idx="2"/>
+          </p:nvPr>
+        </p:nvSpPr>
+        <p:spPr/>
+      </p:sp>
+      <p:sp>
+        <p:nvSpPr>
+          <p:cNvPr id="3" name="Notes Placeholder 2"/>
+          <p:cNvSpPr>
+            <a:spLocks noGrp="1"/>
+          </p:cNvSpPr>
+          <p:nvPr>
+            <p:ph type="body" idx="3" sz="quarter"/>
+          </p:nvPr>
+        </p:nvSpPr>
+        <p:spPr/>
+        <p:txBody>
+          <a:bodyPr/>
+          <a:lstStyle/>
+          <a:p>
+            <a:r>
+              <a:t>Claude Codeではスキルとして自分のスラッシュコマンドを作れます。</a:t>
+            </a:r>
+          </a:p>
+          <a:p>
+            <a:r>
+              <a:t>.claude/skills/ ディレクトリにMarkdownファイルを置くだけ。</a:t>
+            </a:r>
+          </a:p>
+          <a:p/>
+          <a:p>
+            <a:r>
+              <a:t>CLAUDE.mdとの違いを整理すると、CLAUDE.mdは「常に」自動で読み込まれる「常識」。スキルは「必要なときだけ」読み込まれる「専門知識」。</a:t>
+            </a:r>
+          </a:p>
+          <a:p/>
+          <a:p>
+            <a:r>
+              <a:t>CLAUDE.mdに全部詰め込むとコンテキストを圧迫してパフォーマンスが落ちます。状況に応じて読み込ませたい情報はスキルに分けるのが良いです。</a:t>
+            </a:r>
+          </a:p>
+          <a:p/>
+          <a:p>
+            <a:r>
+              <a:t>.claude/skills/ をgit管理すれば、チーム全体でスキルを共有できます。</a:t>
+            </a:r>
+          </a:p>
+        </p:txBody>
+      </p:sp>
+      <p:sp>
+        <p:nvSpPr>
+          <p:cNvPr id="4" name="Slide Number Placeholder 3"/>
+          <p:cNvSpPr>
+            <a:spLocks noGrp="1"/>
+          </p:cNvSpPr>
+          <p:nvPr>
+            <p:ph type="sldNum" idx="5" sz="quarter"/>
+          </p:nvPr>
+        </p:nvSpPr>
+        <p:spPr/>
+      </p:sp>
+    </p:spTree>
+  </p:cSld>
+  <p:clrMapOvr>
+    <a:masterClrMapping/>
+  </p:clrMapOvr>
+</p:notes>
+</file>
+
+<file path=ppt/notesSlides/notesSlide14.xml><?xml version="1.0" encoding="utf-8"?>
+<p:notes xmlns:a="http://schemas.openxmlformats.org/drawingml/2006/main" xmlns:p="http://schemas.openxmlformats.org/presentationml/2006/main" xmlns:r="http://schemas.openxmlformats.org/officeDocument/2006/relationships">
+  <p:cSld>
+    <p:spTree>
+      <p:nvGrpSpPr>
+        <p:cNvPr id="1" name=""/>
+        <p:cNvGrpSpPr/>
+        <p:nvPr/>
+      </p:nvGrpSpPr>
+      <p:grpSpPr>
+        <a:xfrm>
+          <a:off x="0" y="0"/>
+          <a:ext cx="0" cy="0"/>
+          <a:chOff x="0" y="0"/>
+          <a:chExt cx="0" cy="0"/>
+        </a:xfrm>
+      </p:grpSpPr>
+      <p:sp>
+        <p:nvSpPr>
+          <p:cNvPr id="2" name="Slide Image Placeholder 1"/>
+          <p:cNvSpPr>
+            <a:spLocks noGrp="1"/>
+          </p:cNvSpPr>
+          <p:nvPr>
+            <p:ph type="sldImg" idx="2"/>
+          </p:nvPr>
+        </p:nvSpPr>
+        <p:spPr/>
+      </p:sp>
+      <p:sp>
+        <p:nvSpPr>
+          <p:cNvPr id="3" name="Notes Placeholder 2"/>
+          <p:cNvSpPr>
+            <a:spLocks noGrp="1"/>
+          </p:cNvSpPr>
+          <p:nvPr>
+            <p:ph type="body" idx="3" sz="quarter"/>
+          </p:nvPr>
+        </p:nvSpPr>
+        <p:spPr/>
+        <p:txBody>
+          <a:bodyPr/>
+          <a:lstStyle/>
+          <a:p>
+            <a:r>
+              <a:t>スキルには2つのタイプがあります。参照コンテンツとタスクコンテンツです。</a:t>
+            </a:r>
+          </a:p>
+          <a:p/>
+          <a:p>
+            <a:r>
+              <a:t>参照コンテンツは「知識」。API設計パターンのように、関連する作業をClaudeが検知したときに自動で読み込まれます。</a:t>
+            </a:r>
+          </a:p>
+          <a:p/>
+          <a:p>
+            <a:r>
+              <a:t>タスクコンテンツは「手順」。/fix-issue 42 のように明示的に呼び出して使います。</a:t>
+            </a:r>
+          </a:p>
+          <a:p>
+            <a:r>
+              <a:t>disable-model-invocation: true を設定すると、自動では呼び出されず明示的に使うときだけ読み込まれます。</a:t>
+            </a:r>
+          </a:p>
+          <a:p/>
+          <a:p>
+            <a:r>
+              <a:t>下の例では  で引数を受け取っています。Issueの番号を渡すと、そのIssueの修正ワークフロー全体が自動で回ります。</a:t>
+            </a:r>
+          </a:p>
+        </p:txBody>
+      </p:sp>
+      <p:sp>
+        <p:nvSpPr>
+          <p:cNvPr id="4" name="Slide Number Placeholder 3"/>
+          <p:cNvSpPr>
+            <a:spLocks noGrp="1"/>
+          </p:cNvSpPr>
+          <p:nvPr>
+            <p:ph type="sldNum" idx="5" sz="quarter"/>
+          </p:nvPr>
+        </p:nvSpPr>
+        <p:spPr/>
+      </p:sp>
+    </p:spTree>
+  </p:cSld>
+  <p:clrMapOvr>
+    <a:masterClrMapping/>
+  </p:clrMapOvr>
+</p:notes>
+</file>
+
+<file path=ppt/notesSlides/notesSlide15.xml><?xml version="1.0" encoding="utf-8"?>
+<p:notes xmlns:a="http://schemas.openxmlformats.org/drawingml/2006/main" xmlns:p="http://schemas.openxmlformats.org/presentationml/2006/main" xmlns:r="http://schemas.openxmlformats.org/officeDocument/2006/relationships">
+  <p:cSld>
+    <p:spTree>
+      <p:nvGrpSpPr>
+        <p:cNvPr id="1" name=""/>
+        <p:cNvGrpSpPr/>
+        <p:nvPr/>
+      </p:nvGrpSpPr>
+      <p:grpSpPr>
+        <a:xfrm>
+          <a:off x="0" y="0"/>
+          <a:ext cx="0" cy="0"/>
+          <a:chOff x="0" y="0"/>
+          <a:chExt cx="0" cy="0"/>
+        </a:xfrm>
+      </p:grpSpPr>
+      <p:sp>
+        <p:nvSpPr>
+          <p:cNvPr id="2" name="Slide Image Placeholder 1"/>
+          <p:cNvSpPr>
+            <a:spLocks noGrp="1"/>
+          </p:cNvSpPr>
+          <p:nvPr>
+            <p:ph type="sldImg" idx="2"/>
+          </p:nvPr>
+        </p:nvSpPr>
+        <p:spPr/>
+      </p:sp>
+      <p:sp>
+        <p:nvSpPr>
+          <p:cNvPr id="3" name="Notes Placeholder 2"/>
+          <p:cNvSpPr>
+            <a:spLocks noGrp="1"/>
+          </p:cNvSpPr>
+          <p:nvPr>
+            <p:ph type="body" idx="3" sz="quarter"/>
+          </p:nvPr>
+        </p:nvSpPr>
+        <p:spPr/>
+        <p:txBody>
+          <a:bodyPr/>
+          <a:lstStyle/>
+          <a:p>
+            <a:r>
+              <a:t>実際にスキルを呼び出してみます。</a:t>
+            </a:r>
+          </a:p>
+          <a:p/>
+          <a:p>
+            <a:r>
+              <a:t>（例: /self-review を実行）するとこんな風にレビュー手順に沿って差分をチェックしてくれます。</a:t>
+            </a:r>
+          </a:p>
+          <a:p/>
+          <a:p>
+            <a:r>
+              <a:t>毎回「git diffを見て、命名規則とエラーハンドリングをチェックして...」と手入力する必要がなくなります。</a:t>
+            </a:r>
+          </a:p>
+          <a:p/>
+          <a:p>
+            <a:r>
+              <a:t>繰り返しの指示をスキル化しておくことで、品質が安定し、時間も節約できます。</a:t>
+            </a:r>
+          </a:p>
+        </p:txBody>
+      </p:sp>
+      <p:sp>
+        <p:nvSpPr>
+          <p:cNvPr id="4" name="Slide Number Placeholder 3"/>
+          <p:cNvSpPr>
+            <a:spLocks noGrp="1"/>
+          </p:cNvSpPr>
+          <p:nvPr>
+            <p:ph type="sldNum" idx="5" sz="quarter"/>
+          </p:nvPr>
+        </p:nvSpPr>
+        <p:spPr/>
+      </p:sp>
+    </p:spTree>
+  </p:cSld>
+  <p:clrMapOvr>
+    <a:masterClrMapping/>
+  </p:clrMapOvr>
+</p:notes>
+</file>
+
+<file path=ppt/notesSlides/notesSlide16.xml><?xml version="1.0" encoding="utf-8"?>
+<p:notes xmlns:a="http://schemas.openxmlformats.org/drawingml/2006/main" xmlns:p="http://schemas.openxmlformats.org/presentationml/2006/main" xmlns:r="http://schemas.openxmlformats.org/officeDocument/2006/relationships">
+  <p:cSld>
+    <p:spTree>
+      <p:nvGrpSpPr>
+        <p:cNvPr id="1" name=""/>
+        <p:cNvGrpSpPr/>
+        <p:nvPr/>
+      </p:nvGrpSpPr>
+      <p:grpSpPr>
+        <a:xfrm>
+          <a:off x="0" y="0"/>
+          <a:ext cx="0" cy="0"/>
+          <a:chOff x="0" y="0"/>
+          <a:chExt cx="0" cy="0"/>
+        </a:xfrm>
+      </p:grpSpPr>
+      <p:sp>
+        <p:nvSpPr>
+          <p:cNvPr id="2" name="Slide Image Placeholder 1"/>
+          <p:cNvSpPr>
+            <a:spLocks noGrp="1"/>
+          </p:cNvSpPr>
+          <p:nvPr>
+            <p:ph type="sldImg" idx="2"/>
+          </p:nvPr>
+        </p:nvSpPr>
+        <p:spPr/>
+      </p:sp>
+      <p:sp>
+        <p:nvSpPr>
+          <p:cNvPr id="3" name="Notes Placeholder 2"/>
+          <p:cNvSpPr>
+            <a:spLocks noGrp="1"/>
+          </p:cNvSpPr>
+          <p:nvPr>
+            <p:ph type="body" idx="3" sz="quarter"/>
+          </p:nvPr>
+        </p:nvSpPr>
+        <p:spPr/>
+        <p:txBody>
+          <a:bodyPr/>
+          <a:lstStyle/>
+          <a:p>
+            <a:r>
+              <a:t>PART 3、Hooksです。</a:t>
+            </a:r>
+          </a:p>
+          <a:p>
+            <a:r>
+              <a:t>「人間が忘れても、Hooksが動く」。CLAUDE.mdで教え、スキルで手順化し、最後はHooksで自動化する。この流れの仕上げです。</a:t>
+            </a:r>
+          </a:p>
+        </p:txBody>
+      </p:sp>
+      <p:sp>
+        <p:nvSpPr>
+          <p:cNvPr id="4" name="Slide Number Placeholder 3"/>
+          <p:cNvSpPr>
+            <a:spLocks noGrp="1"/>
+          </p:cNvSpPr>
+          <p:nvPr>
+            <p:ph type="sldNum" idx="5" sz="quarter"/>
+          </p:nvPr>
+        </p:nvSpPr>
+        <p:spPr/>
+      </p:sp>
+    </p:spTree>
+  </p:cSld>
+  <p:clrMapOvr>
+    <a:masterClrMapping/>
+  </p:clrMapOvr>
+</p:notes>
+</file>
+
+<file path=ppt/notesSlides/notesSlide17.xml><?xml version="1.0" encoding="utf-8"?>
+<p:notes xmlns:a="http://schemas.openxmlformats.org/drawingml/2006/main" xmlns:p="http://schemas.openxmlformats.org/presentationml/2006/main" xmlns:r="http://schemas.openxmlformats.org/officeDocument/2006/relationships">
+  <p:cSld>
+    <p:spTree>
+      <p:nvGrpSpPr>
+        <p:cNvPr id="1" name=""/>
+        <p:cNvGrpSpPr/>
+        <p:nvPr/>
+      </p:nvGrpSpPr>
+      <p:grpSpPr>
+        <a:xfrm>
+          <a:off x="0" y="0"/>
+          <a:ext cx="0" cy="0"/>
+          <a:chOff x="0" y="0"/>
+          <a:chExt cx="0" cy="0"/>
+        </a:xfrm>
+      </p:grpSpPr>
+      <p:sp>
+        <p:nvSpPr>
+          <p:cNvPr id="2" name="Slide Image Placeholder 1"/>
+          <p:cNvSpPr>
+            <a:spLocks noGrp="1"/>
+          </p:cNvSpPr>
+          <p:nvPr>
+            <p:ph type="sldImg" idx="2"/>
+          </p:nvPr>
+        </p:nvSpPr>
+        <p:spPr/>
+      </p:sp>
+      <p:sp>
+        <p:nvSpPr>
+          <p:cNvPr id="3" name="Notes Placeholder 2"/>
+          <p:cNvSpPr>
+            <a:spLocks noGrp="1"/>
+          </p:cNvSpPr>
+          <p:nvPr>
+            <p:ph type="body" idx="3" sz="quarter"/>
+          </p:nvPr>
+        </p:nvSpPr>
+        <p:spPr/>
+        <p:txBody>
+          <a:bodyPr/>
+          <a:lstStyle/>
+          <a:p>
+            <a:r>
+              <a:t>Hooksは、Claude Codeの特定のタイミングで自動でコマンドを実行する仕組みです。</a:t>
+            </a:r>
+          </a:p>
+          <a:p>
+            <a:r>
+              <a:t>CIのpre-commitフックを知っている方は、あれに近い概念です。</a:t>
+            </a:r>
+          </a:p>
+          <a:p/>
+          <a:p>
+            <a:r>
+              <a:t>たとえば、ファイル編集後に自動でlintを走らせる。危険なBashコマンドの実行を事前にブロックする。</a:t>
+            </a:r>
+          </a:p>
+          <a:p/>
+          <a:p>
+            <a:r>
+              <a:t>設定は .claude/settings.json に書きます。これもgit管理すれば、チーム全体で同じ品質ゲートを共有できます。</a:t>
+            </a:r>
+          </a:p>
+          <a:p/>
+          <a:p>
+            <a:r>
+              <a:t>エージェントの出力品質は一定ではありません。同じ指示でも結果がばらつくことがある。Hooksで機械的にチェックを挟むことで、品質を担保できます。</a:t>
+            </a:r>
+          </a:p>
+        </p:txBody>
+      </p:sp>
+      <p:sp>
+        <p:nvSpPr>
+          <p:cNvPr id="4" name="Slide Number Placeholder 3"/>
+          <p:cNvSpPr>
+            <a:spLocks noGrp="1"/>
+          </p:cNvSpPr>
+          <p:nvPr>
+            <p:ph type="sldNum" idx="5" sz="quarter"/>
+          </p:nvPr>
+        </p:nvSpPr>
+        <p:spPr/>
+      </p:sp>
+    </p:spTree>
+  </p:cSld>
+  <p:clrMapOvr>
+    <a:masterClrMapping/>
+  </p:clrMapOvr>
+</p:notes>
+</file>
+
+<file path=ppt/notesSlides/notesSlide18.xml><?xml version="1.0" encoding="utf-8"?>
+<p:notes xmlns:a="http://schemas.openxmlformats.org/drawingml/2006/main" xmlns:p="http://schemas.openxmlformats.org/presentationml/2006/main" xmlns:r="http://schemas.openxmlformats.org/officeDocument/2006/relationships">
+  <p:cSld>
+    <p:spTree>
+      <p:nvGrpSpPr>
+        <p:cNvPr id="1" name=""/>
+        <p:cNvGrpSpPr/>
+        <p:nvPr/>
+      </p:nvGrpSpPr>
+      <p:grpSpPr>
+        <a:xfrm>
+          <a:off x="0" y="0"/>
+          <a:ext cx="0" cy="0"/>
+          <a:chOff x="0" y="0"/>
+          <a:chExt cx="0" cy="0"/>
+        </a:xfrm>
+      </p:grpSpPr>
+      <p:sp>
+        <p:nvSpPr>
+          <p:cNvPr id="2" name="Slide Image Placeholder 1"/>
+          <p:cNvSpPr>
+            <a:spLocks noGrp="1"/>
+          </p:cNvSpPr>
+          <p:nvPr>
+            <p:ph type="sldImg" idx="2"/>
+          </p:nvPr>
+        </p:nvSpPr>
+        <p:spPr/>
+      </p:sp>
+      <p:sp>
+        <p:nvSpPr>
+          <p:cNvPr id="3" name="Notes Placeholder 2"/>
+          <p:cNvSpPr>
+            <a:spLocks noGrp="1"/>
+          </p:cNvSpPr>
+          <p:nvPr>
+            <p:ph type="body" idx="3" sz="quarter"/>
+          </p:nvPr>
+        </p:nvSpPr>
+        <p:spPr/>
+        <p:txBody>
+          <a:bodyPr/>
+          <a:lstStyle/>
+          <a:p>
+            <a:r>
+              <a:t>具体例を3つ紹介します。</a:t>
+            </a:r>
+          </a:p>
+          <a:p/>
+          <a:p>
+            <a:r>
+              <a:t>例1: 編集後のlint自動修正。Claudeがファイルを編集するたびlintが走って自動修正される。</a:t>
+            </a:r>
+          </a:p>
+          <a:p/>
+          <a:p>
+            <a:r>
+              <a:t>例2: 危険なコマンドのブロック。rm -rf を含むBashコマンドの実行を事前にブロックできます。PreToolUseに設定します。</a:t>
+            </a:r>
+          </a:p>
+          <a:p/>
+          <a:p>
+            <a:r>
+              <a:t>例3: Goプロジェクトなら go vet を編集後に走らせるなど、言語に合わせた設定ができます。</a:t>
+            </a:r>
+          </a:p>
+          <a:p/>
+          <a:p>
+            <a:r>
+              <a:t>重要なポイントとして、Hooksが失敗するとClaudeにその結果が通知されます。するとClaudeが自分で修正を試みてくれます。自動チェックとエージェントの自己修正が組み合わさるのが強力なところです。</a:t>
+            </a:r>
+          </a:p>
+          <a:p/>
+          <a:p>
+            <a:r>
+              <a:t>ここでは編集前後のフックを中心に紹介しましたが、NotificationイベントでSlack通知を飛ばしたり、StopイベントでセッションのレポートをMarkdownに出力する、といった使い方もできます。</a:t>
+            </a:r>
+          </a:p>
+        </p:txBody>
+      </p:sp>
+      <p:sp>
+        <p:nvSpPr>
+          <p:cNvPr id="4" name="Slide Number Placeholder 3"/>
+          <p:cNvSpPr>
+            <a:spLocks noGrp="1"/>
+          </p:cNvSpPr>
+          <p:nvPr>
+            <p:ph type="sldNum" idx="5" sz="quarter"/>
+          </p:nvPr>
+        </p:nvSpPr>
+        <p:spPr/>
+      </p:sp>
+    </p:spTree>
+  </p:cSld>
+  <p:clrMapOvr>
+    <a:masterClrMapping/>
+  </p:clrMapOvr>
+</p:notes>
+</file>
+
+<file path=ppt/notesSlides/notesSlide19.xml><?xml version="1.0" encoding="utf-8"?>
+<p:notes xmlns:a="http://schemas.openxmlformats.org/drawingml/2006/main" xmlns:p="http://schemas.openxmlformats.org/presentationml/2006/main" xmlns:r="http://schemas.openxmlformats.org/officeDocument/2006/relationships">
+  <p:cSld>
+    <p:spTree>
+      <p:nvGrpSpPr>
+        <p:cNvPr id="1" name=""/>
+        <p:cNvGrpSpPr/>
+        <p:nvPr/>
+      </p:nvGrpSpPr>
+      <p:grpSpPr>
+        <a:xfrm>
+          <a:off x="0" y="0"/>
+          <a:ext cx="0" cy="0"/>
+          <a:chOff x="0" y="0"/>
+          <a:chExt cx="0" cy="0"/>
+        </a:xfrm>
+      </p:grpSpPr>
+      <p:sp>
+        <p:nvSpPr>
+          <p:cNvPr id="2" name="Slide Image Placeholder 1"/>
+          <p:cNvSpPr>
+            <a:spLocks noGrp="1"/>
+          </p:cNvSpPr>
+          <p:nvPr>
+            <p:ph type="sldImg" idx="2"/>
+          </p:nvPr>
+        </p:nvSpPr>
+        <p:spPr/>
+      </p:sp>
+      <p:sp>
+        <p:nvSpPr>
+          <p:cNvPr id="3" name="Notes Placeholder 2"/>
+          <p:cNvSpPr>
+            <a:spLocks noGrp="1"/>
+          </p:cNvSpPr>
+          <p:nvPr>
+            <p:ph type="body" idx="3" sz="quarter"/>
+          </p:nvPr>
+        </p:nvSpPr>
+        <p:spPr/>
+        <p:txBody>
+          <a:bodyPr/>
+          <a:lstStyle/>
+          <a:p>
+            <a:r>
+              <a:t>まとめです。今日の持ち帰りは3つ。</a:t>
+            </a:r>
+          </a:p>
+          <a:p/>
+          <a:p>
+            <a:r>
+              <a:t>1つ目: CLAUDE.mdでプロジェクトの「常識」を教える。毎回の説明が不要になります。</a:t>
+            </a:r>
+          </a:p>
+          <a:p/>
+          <a:p>
+            <a:r>
+              <a:t>2つ目: Skillsで繰り返しの指示をテンプレート化する。同じ指示を何度も書かなくてよくなります。</a:t>
+            </a:r>
+          </a:p>
+          <a:p/>
+          <a:p>
+            <a:r>
+              <a:t>3つ目: Hooksで品質チェックを自動化する。人間が忘れても、機械が動きます。</a:t>
+            </a:r>
+          </a:p>
+          <a:p/>
+          <a:p>
+            <a:r>
+              <a:t>覚え方としては「教える、呼び出す、自動化する」。この3つの段階で、Claude Codeをプロジェクトに定着させていけます。</a:t>
+            </a:r>
+          </a:p>
+          <a:p/>
+          <a:p>
+            <a:r>
+              <a:t>次回、第3回は「大規模開発に挑む」。MCP、worktree、サブエージェントを扱います。</a:t>
+            </a:r>
+          </a:p>
+          <a:p>
+            <a:r>
+              <a:t>では、質疑応答に移ります。</a:t>
+            </a:r>
+          </a:p>
+        </p:txBody>
+      </p:sp>
+      <p:sp>
+        <p:nvSpPr>
+          <p:cNvPr id="4" name="Slide Number Placeholder 3"/>
+          <p:cNvSpPr>
+            <a:spLocks noGrp="1"/>
+          </p:cNvSpPr>
+          <p:nvPr>
+            <p:ph type="sldNum" idx="5" sz="quarter"/>
+          </p:nvPr>
+        </p:nvSpPr>
+        <p:spPr/>
+      </p:sp>
+    </p:spTree>
+  </p:cSld>
+  <p:clrMapOvr>
+    <a:masterClrMapping/>
+  </p:clrMapOvr>
+</p:notes>
+</file>
+
+<file path=ppt/notesSlides/notesSlide2.xml><?xml version="1.0" encoding="utf-8"?>
+<p:notes xmlns:a="http://schemas.openxmlformats.org/drawingml/2006/main" xmlns:p="http://schemas.openxmlformats.org/presentationml/2006/main" xmlns:r="http://schemas.openxmlformats.org/officeDocument/2006/relationships">
+  <p:cSld>
+    <p:spTree>
+      <p:nvGrpSpPr>
+        <p:cNvPr id="1" name=""/>
+        <p:cNvGrpSpPr/>
+        <p:nvPr/>
+      </p:nvGrpSpPr>
+      <p:grpSpPr>
+        <a:xfrm>
+          <a:off x="0" y="0"/>
+          <a:ext cx="0" cy="0"/>
+          <a:chOff x="0" y="0"/>
+          <a:chExt cx="0" cy="0"/>
+        </a:xfrm>
+      </p:grpSpPr>
+      <p:sp>
+        <p:nvSpPr>
+          <p:cNvPr id="2" name="Slide Image Placeholder 1"/>
+          <p:cNvSpPr>
+            <a:spLocks noGrp="1"/>
+          </p:cNvSpPr>
+          <p:nvPr>
+            <p:ph type="sldImg" idx="2"/>
+          </p:nvPr>
+        </p:nvSpPr>
+        <p:spPr/>
+      </p:sp>
+      <p:sp>
+        <p:nvSpPr>
+          <p:cNvPr id="3" name="Notes Placeholder 2"/>
+          <p:cNvSpPr>
+            <a:spLocks noGrp="1"/>
+          </p:cNvSpPr>
+          <p:nvPr>
+            <p:ph type="body" idx="3" sz="quarter"/>
+          </p:nvPr>
+        </p:nvSpPr>
+        <p:spPr/>
+        <p:txBody>
+          <a:bodyPr/>
+          <a:lstStyle/>
+          <a:p>
+            <a:r>
+              <a:t>全3回の2回目です。第1回は「理解する」がテーマでした。</a:t>
+            </a:r>
+          </a:p>
+          <a:p/>
+          <a:p>
+            <a:r>
+              <a:t>今回は「プロジェクトに定着させる」。Claude Codeを使い始めたはいいけど、毎回同じ説明をしている、チームに展開しづらい、という課題を解決します。</a:t>
+            </a:r>
+          </a:p>
+          <a:p/>
+          <a:p>
+            <a:r>
+              <a:t>今日のゴールは、自分のプロジェクトに合わせた設定ができるようになることです。</a:t>
+            </a:r>
+          </a:p>
+        </p:txBody>
+      </p:sp>
+      <p:sp>
+        <p:nvSpPr>
+          <p:cNvPr id="4" name="Slide Number Placeholder 3"/>
+          <p:cNvSpPr>
+            <a:spLocks noGrp="1"/>
+          </p:cNvSpPr>
+          <p:nvPr>
+            <p:ph type="sldNum" idx="5" sz="quarter"/>
+          </p:nvPr>
+        </p:nvSpPr>
+        <p:spPr/>
+      </p:sp>
+    </p:spTree>
+  </p:cSld>
+  <p:clrMapOvr>
+    <a:masterClrMapping/>
+  </p:clrMapOvr>
+</p:notes>
+</file>
+
+<file path=ppt/notesSlides/notesSlide3.xml><?xml version="1.0" encoding="utf-8"?>
+<p:notes xmlns:a="http://schemas.openxmlformats.org/drawingml/2006/main" xmlns:p="http://schemas.openxmlformats.org/presentationml/2006/main" xmlns:r="http://schemas.openxmlformats.org/officeDocument/2006/relationships">
+  <p:cSld>
+    <p:spTree>
+      <p:nvGrpSpPr>
+        <p:cNvPr id="1" name=""/>
+        <p:cNvGrpSpPr/>
+        <p:nvPr/>
+      </p:nvGrpSpPr>
+      <p:grpSpPr>
+        <a:xfrm>
+          <a:off x="0" y="0"/>
+          <a:ext cx="0" cy="0"/>
+          <a:chOff x="0" y="0"/>
+          <a:chExt cx="0" cy="0"/>
+        </a:xfrm>
+      </p:grpSpPr>
+      <p:sp>
+        <p:nvSpPr>
+          <p:cNvPr id="2" name="Slide Image Placeholder 1"/>
+          <p:cNvSpPr>
+            <a:spLocks noGrp="1"/>
+          </p:cNvSpPr>
+          <p:nvPr>
+            <p:ph type="sldImg" idx="2"/>
+          </p:nvPr>
+        </p:nvSpPr>
+        <p:spPr/>
+      </p:sp>
+      <p:sp>
+        <p:nvSpPr>
+          <p:cNvPr id="3" name="Notes Placeholder 2"/>
+          <p:cNvSpPr>
+            <a:spLocks noGrp="1"/>
+          </p:cNvSpPr>
+          <p:nvPr>
+            <p:ph type="body" idx="3" sz="quarter"/>
+          </p:nvPr>
+        </p:nvSpPr>
+        <p:spPr/>
+        <p:txBody>
+          <a:bodyPr/>
+          <a:lstStyle/>
+          <a:p>
+            <a:r>
+              <a:t>PART 1は「コンテキストとCLAUDE.md」。</a:t>
+            </a:r>
+          </a:p>
+          <a:p>
+            <a:r>
+              <a:t>「毎回の説明、もう要らない」というのがこのパートのキーメッセージです。</a:t>
+            </a:r>
+          </a:p>
+          <a:p>
+            <a:r>
+              <a:t>Claude Codeが何を見ているのか、なぜ忘れるのかを理解した上で、CLAUDE.mdの効果的な使い方を学びます。</a:t>
+            </a:r>
+          </a:p>
+        </p:txBody>
+      </p:sp>
+      <p:sp>
+        <p:nvSpPr>
+          <p:cNvPr id="4" name="Slide Number Placeholder 3"/>
+          <p:cNvSpPr>
+            <a:spLocks noGrp="1"/>
+          </p:cNvSpPr>
+          <p:nvPr>
+            <p:ph type="sldNum" idx="5" sz="quarter"/>
+          </p:nvPr>
+        </p:nvSpPr>
+        <p:spPr/>
+      </p:sp>
+    </p:spTree>
+  </p:cSld>
+  <p:clrMapOvr>
+    <a:masterClrMapping/>
+  </p:clrMapOvr>
+</p:notes>
+</file>
+
+<file path=ppt/notesSlides/notesSlide4.xml><?xml version="1.0" encoding="utf-8"?>
+<p:notes xmlns:a="http://schemas.openxmlformats.org/drawingml/2006/main" xmlns:p="http://schemas.openxmlformats.org/presentationml/2006/main" xmlns:r="http://schemas.openxmlformats.org/officeDocument/2006/relationships">
+  <p:cSld>
+    <p:spTree>
+      <p:nvGrpSpPr>
+        <p:cNvPr id="1" name=""/>
+        <p:cNvGrpSpPr/>
+        <p:nvPr/>
+      </p:nvGrpSpPr>
+      <p:grpSpPr>
+        <a:xfrm>
+          <a:off x="0" y="0"/>
+          <a:ext cx="0" cy="0"/>
+          <a:chOff x="0" y="0"/>
+          <a:chExt cx="0" cy="0"/>
+        </a:xfrm>
+      </p:grpSpPr>
+      <p:sp>
+        <p:nvSpPr>
+          <p:cNvPr id="2" name="Slide Image Placeholder 1"/>
+          <p:cNvSpPr>
+            <a:spLocks noGrp="1"/>
+          </p:cNvSpPr>
+          <p:nvPr>
+            <p:ph type="sldImg" idx="2"/>
+          </p:nvPr>
+        </p:nvSpPr>
+        <p:spPr/>
+      </p:sp>
+      <p:sp>
+        <p:nvSpPr>
+          <p:cNvPr id="3" name="Notes Placeholder 2"/>
+          <p:cNvSpPr>
+            <a:spLocks noGrp="1"/>
+          </p:cNvSpPr>
+          <p:nvPr>
+            <p:ph type="body" idx="3" sz="quarter"/>
+          </p:nvPr>
+        </p:nvSpPr>
+        <p:spPr/>
+        <p:txBody>
+          <a:bodyPr/>
+          <a:lstStyle/>
+          <a:p>
+            <a:r>
+              <a:t>Claude Codeが何を見ているのか。「コンテキストウィンドウ」という概念がまず大事です。</a:t>
+            </a:r>
+          </a:p>
+          <a:p>
+            <a:r>
+              <a:t>これはClaudeの作業メモリのようなものです。上限は約200,000トークン。</a:t>
+            </a:r>
+          </a:p>
+          <a:p/>
+          <a:p>
+            <a:r>
+              <a:t>セッションが始まると、まずCLAUDE.mdが自動で読み込まれます。そこに会話のやりとり、読んだファイル、コマンドの実行結果が積み重なっていきます。</a:t>
+            </a:r>
+          </a:p>
+          <a:p/>
+          <a:p>
+            <a:r>
+              <a:t>このメモリには限りがある、ということを覚えておいてください。</a:t>
+            </a:r>
+          </a:p>
+        </p:txBody>
+      </p:sp>
+      <p:sp>
+        <p:nvSpPr>
+          <p:cNvPr id="4" name="Slide Number Placeholder 3"/>
+          <p:cNvSpPr>
+            <a:spLocks noGrp="1"/>
+          </p:cNvSpPr>
+          <p:nvPr>
+            <p:ph type="sldNum" idx="5" sz="quarter"/>
+          </p:nvPr>
+        </p:nvSpPr>
+        <p:spPr/>
+      </p:sp>
+    </p:spTree>
+  </p:cSld>
+  <p:clrMapOvr>
+    <a:masterClrMapping/>
+  </p:clrMapOvr>
+</p:notes>
+</file>
+
+<file path=ppt/notesSlides/notesSlide5.xml><?xml version="1.0" encoding="utf-8"?>
+<p:notes xmlns:a="http://schemas.openxmlformats.org/drawingml/2006/main" xmlns:p="http://schemas.openxmlformats.org/presentationml/2006/main" xmlns:r="http://schemas.openxmlformats.org/officeDocument/2006/relationships">
+  <p:cSld>
+    <p:spTree>
+      <p:nvGrpSpPr>
+        <p:cNvPr id="1" name=""/>
+        <p:cNvGrpSpPr/>
+        <p:nvPr/>
+      </p:nvGrpSpPr>
+      <p:grpSpPr>
+        <a:xfrm>
+          <a:off x="0" y="0"/>
+          <a:ext cx="0" cy="0"/>
+          <a:chOff x="0" y="0"/>
+          <a:chExt cx="0" cy="0"/>
+        </a:xfrm>
+      </p:grpSpPr>
+      <p:sp>
+        <p:nvSpPr>
+          <p:cNvPr id="2" name="Slide Image Placeholder 1"/>
+          <p:cNvSpPr>
+            <a:spLocks noGrp="1"/>
+          </p:cNvSpPr>
+          <p:nvPr>
+            <p:ph type="sldImg" idx="2"/>
+          </p:nvPr>
+        </p:nvSpPr>
+        <p:spPr/>
+      </p:sp>
+      <p:sp>
+        <p:nvSpPr>
+          <p:cNvPr id="3" name="Notes Placeholder 2"/>
+          <p:cNvSpPr>
+            <a:spLocks noGrp="1"/>
+          </p:cNvSpPr>
+          <p:nvPr>
+            <p:ph type="body" idx="3" sz="quarter"/>
+          </p:nvPr>
+        </p:nvSpPr>
+        <p:spPr/>
+        <p:txBody>
+          <a:bodyPr/>
+          <a:lstStyle/>
+          <a:p>
+            <a:r>
+              <a:t>Claude Codeが「忘れる」原因がこれです。コンパクトという自動圧縮が発生します。</a:t>
+            </a:r>
+          </a:p>
+          <a:p>
+            <a:r>
+              <a:t>コンテキストが上限に近づくと、古い情報が要約・削除されます。</a:t>
+            </a:r>
+          </a:p>
+          <a:p/>
+          <a:p>
+            <a:r>
+              <a:t>なので、最初に「このファイルは触らないで」と言っても、長いセッションの後では忘れられることがある。</a:t>
+            </a:r>
+          </a:p>
+          <a:p/>
+          <a:p>
+            <a:r>
+              <a:t>対策として一番重要なのが、重要な情報はCLAUDE.mdに書くこと。CLAUDE.mdは毎セッション最初に読み込まれるので、コンパクトで消えない「永続メモリ」として機能します。</a:t>
+            </a:r>
+          </a:p>
+          <a:p/>
+          <a:p>
+            <a:r>
+              <a:t>作業が変わるタイミングで /clear でリセットするのも有効です。</a:t>
+            </a:r>
+          </a:p>
+        </p:txBody>
+      </p:sp>
+      <p:sp>
+        <p:nvSpPr>
+          <p:cNvPr id="4" name="Slide Number Placeholder 3"/>
+          <p:cNvSpPr>
+            <a:spLocks noGrp="1"/>
+          </p:cNvSpPr>
+          <p:nvPr>
+            <p:ph type="sldNum" idx="5" sz="quarter"/>
+          </p:nvPr>
+        </p:nvSpPr>
+        <p:spPr/>
+      </p:sp>
+    </p:spTree>
+  </p:cSld>
+  <p:clrMapOvr>
+    <a:masterClrMapping/>
+  </p:clrMapOvr>
+</p:notes>
+</file>
+
+<file path=ppt/notesSlides/notesSlide6.xml><?xml version="1.0" encoding="utf-8"?>
+<p:notes xmlns:a="http://schemas.openxmlformats.org/drawingml/2006/main" xmlns:p="http://schemas.openxmlformats.org/presentationml/2006/main" xmlns:r="http://schemas.openxmlformats.org/officeDocument/2006/relationships">
+  <p:cSld>
+    <p:spTree>
+      <p:nvGrpSpPr>
+        <p:cNvPr id="1" name=""/>
+        <p:cNvGrpSpPr/>
+        <p:nvPr/>
+      </p:nvGrpSpPr>
+      <p:grpSpPr>
+        <a:xfrm>
+          <a:off x="0" y="0"/>
+          <a:ext cx="0" cy="0"/>
+          <a:chOff x="0" y="0"/>
+          <a:chExt cx="0" cy="0"/>
+        </a:xfrm>
+      </p:grpSpPr>
+      <p:sp>
+        <p:nvSpPr>
+          <p:cNvPr id="2" name="Slide Image Placeholder 1"/>
+          <p:cNvSpPr>
+            <a:spLocks noGrp="1"/>
+          </p:cNvSpPr>
+          <p:nvPr>
+            <p:ph type="sldImg" idx="2"/>
+          </p:nvPr>
+        </p:nvSpPr>
+        <p:spPr/>
+      </p:sp>
+      <p:sp>
+        <p:nvSpPr>
+          <p:cNvPr id="3" name="Notes Placeholder 2"/>
+          <p:cNvSpPr>
+            <a:spLocks noGrp="1"/>
+          </p:cNvSpPr>
+          <p:nvPr>
+            <p:ph type="body" idx="3" sz="quarter"/>
+          </p:nvPr>
+        </p:nvSpPr>
+        <p:spPr/>
+        <p:txBody>
+          <a:bodyPr/>
+          <a:lstStyle/>
+          <a:p>
+            <a:r>
+              <a:t>CLAUDE.mdは、人間のオンボーディング資料と同じ発想です。新しいメンバーに渡す引き継ぎドキュメントと同じように、プロジェクトのルールや構成を書きます。</a:t>
+            </a:r>
+          </a:p>
+          <a:p/>
+          <a:p>
+            <a:r>
+              <a:t>配置場所が3つあります。個人のグローバル設定、プロジェクトルート、サブディレクトリ。</a:t>
+            </a:r>
+          </a:p>
+          <a:p/>
+          <a:p>
+            <a:r>
+              <a:t>プロジェクトルートのCLAUDE.mdが一番よく使います。これをgitで管理すれば、チーム全体で同じ設定を共有できます。</a:t>
+            </a:r>
+          </a:p>
+        </p:txBody>
+      </p:sp>
+      <p:sp>
+        <p:nvSpPr>
+          <p:cNvPr id="4" name="Slide Number Placeholder 3"/>
+          <p:cNvSpPr>
+            <a:spLocks noGrp="1"/>
+          </p:cNvSpPr>
+          <p:nvPr>
+            <p:ph type="sldNum" idx="5" sz="quarter"/>
+          </p:nvPr>
+        </p:nvSpPr>
+        <p:spPr/>
+      </p:sp>
+    </p:spTree>
+  </p:cSld>
+  <p:clrMapOvr>
+    <a:masterClrMapping/>
+  </p:clrMapOvr>
+</p:notes>
+</file>
+
+<file path=ppt/notesSlides/notesSlide7.xml><?xml version="1.0" encoding="utf-8"?>
+<p:notes xmlns:a="http://schemas.openxmlformats.org/drawingml/2006/main" xmlns:p="http://schemas.openxmlformats.org/presentationml/2006/main" xmlns:r="http://schemas.openxmlformats.org/officeDocument/2006/relationships">
+  <p:cSld>
+    <p:spTree>
+      <p:nvGrpSpPr>
+        <p:cNvPr id="1" name=""/>
+        <p:cNvGrpSpPr/>
+        <p:nvPr/>
+      </p:nvGrpSpPr>
+      <p:grpSpPr>
+        <a:xfrm>
+          <a:off x="0" y="0"/>
+          <a:ext cx="0" cy="0"/>
+          <a:chOff x="0" y="0"/>
+          <a:chExt cx="0" cy="0"/>
+        </a:xfrm>
+      </p:grpSpPr>
+      <p:sp>
+        <p:nvSpPr>
+          <p:cNvPr id="2" name="Slide Image Placeholder 1"/>
+          <p:cNvSpPr>
+            <a:spLocks noGrp="1"/>
+          </p:cNvSpPr>
+          <p:nvPr>
+            <p:ph type="sldImg" idx="2"/>
+          </p:nvPr>
+        </p:nvSpPr>
+        <p:spPr/>
+      </p:sp>
+      <p:sp>
+        <p:nvSpPr>
+          <p:cNvPr id="3" name="Notes Placeholder 2"/>
+          <p:cNvSpPr>
+            <a:spLocks noGrp="1"/>
+          </p:cNvSpPr>
+          <p:nvPr>
+            <p:ph type="body" idx="3" sz="quarter"/>
+          </p:nvPr>
+        </p:nvSpPr>
+        <p:spPr/>
+        <p:txBody>
+          <a:bodyPr/>
+          <a:lstStyle/>
+          <a:p>
+            <a:r>
+              <a:t>CLAUDE.mdに何を書くかは、4つのカテゴリで整理するとわかりやすいです。</a:t>
+            </a:r>
+          </a:p>
+          <a:p>
+            <a:r>
+              <a:t>プロジェクト概要、よく使うコマンド、コーディング規約、そしてやってはいけないこと。</a:t>
+            </a:r>
+          </a:p>
+          <a:p/>
+          <a:p>
+            <a:r>
+              <a:t>特に「PRでよく指摘される項目」は書いておくべきです。暗黙知を言語化する良い機会にもなります。</a:t>
+            </a:r>
+          </a:p>
+          <a:p/>
+          <a:p>
+            <a:r>
+              <a:t>ここに出している例は、この勉強会資料を管理しているリポジトリの実物です。</a:t>
+            </a:r>
+          </a:p>
+        </p:txBody>
+      </p:sp>
+      <p:sp>
+        <p:nvSpPr>
+          <p:cNvPr id="4" name="Slide Number Placeholder 3"/>
+          <p:cNvSpPr>
+            <a:spLocks noGrp="1"/>
+          </p:cNvSpPr>
+          <p:nvPr>
+            <p:ph type="sldNum" idx="5" sz="quarter"/>
+          </p:nvPr>
+        </p:nvSpPr>
+        <p:spPr/>
+      </p:sp>
+    </p:spTree>
+  </p:cSld>
+  <p:clrMapOvr>
+    <a:masterClrMapping/>
+  </p:clrMapOvr>
+</p:notes>
+</file>
+
+<file path=ppt/notesSlides/notesSlide8.xml><?xml version="1.0" encoding="utf-8"?>
+<p:notes xmlns:a="http://schemas.openxmlformats.org/drawingml/2006/main" xmlns:p="http://schemas.openxmlformats.org/presentationml/2006/main" xmlns:r="http://schemas.openxmlformats.org/officeDocument/2006/relationships">
+  <p:cSld>
+    <p:spTree>
+      <p:nvGrpSpPr>
+        <p:cNvPr id="1" name=""/>
+        <p:cNvGrpSpPr/>
+        <p:nvPr/>
+      </p:nvGrpSpPr>
+      <p:grpSpPr>
+        <a:xfrm>
+          <a:off x="0" y="0"/>
+          <a:ext cx="0" cy="0"/>
+          <a:chOff x="0" y="0"/>
+          <a:chExt cx="0" cy="0"/>
+        </a:xfrm>
+      </p:grpSpPr>
+      <p:sp>
+        <p:nvSpPr>
+          <p:cNvPr id="2" name="Slide Image Placeholder 1"/>
+          <p:cNvSpPr>
+            <a:spLocks noGrp="1"/>
+          </p:cNvSpPr>
+          <p:nvPr>
+            <p:ph type="sldImg" idx="2"/>
+          </p:nvPr>
+        </p:nvSpPr>
+        <p:spPr/>
+      </p:sp>
+      <p:sp>
+        <p:nvSpPr>
+          <p:cNvPr id="3" name="Notes Placeholder 2"/>
+          <p:cNvSpPr>
+            <a:spLocks noGrp="1"/>
+          </p:cNvSpPr>
+          <p:nvPr>
+            <p:ph type="body" idx="3" sz="quarter"/>
+          </p:nvPr>
+        </p:nvSpPr>
+        <p:spPr/>
+        <p:txBody>
+          <a:bodyPr/>
+          <a:lstStyle/>
+          <a:p>
+            <a:r>
+              <a:t>まずは /init で自動生成するのが一番早いです。プロジェクトの技術スタックやディレクトリ構成を自動検出してくれます。</a:t>
+            </a:r>
+          </a:p>
+          <a:p/>
+          <a:p>
+            <a:r>
+              <a:t>そのたたき台にチーム固有の情報を追記していきます。</a:t>
+            </a:r>
+          </a:p>
+          <a:p/>
+          <a:p>
+            <a:r>
+              <a:t>大事なのが、CLAUDE.mdは育てていくものだということ。最初から完璧を目指さない。使いながら「あ、これも書いておこう」と追記していく。</a:t>
+            </a:r>
+          </a:p>
+          <a:p/>
+          <a:p>
+            <a:r>
+              <a:t>ただし肥大化には注意。500行を超えると、パフォーマンスが低下する可能性があります。モデルが従える指示数には上限があるためです。</a:t>
+            </a:r>
+          </a:p>
+          <a:p/>
+          <a:p>
+            <a:r>
+              <a:t>ちなみに /insights というコマンドもありますが、こちらはPART 2で改めて紹介します。</a:t>
+            </a:r>
+          </a:p>
+        </p:txBody>
+      </p:sp>
+      <p:sp>
+        <p:nvSpPr>
+          <p:cNvPr id="4" name="Slide Number Placeholder 3"/>
+          <p:cNvSpPr>
+            <a:spLocks noGrp="1"/>
+          </p:cNvSpPr>
+          <p:nvPr>
+            <p:ph type="sldNum" idx="5" sz="quarter"/>
+          </p:nvPr>
+        </p:nvSpPr>
+        <p:spPr/>
+      </p:sp>
+    </p:spTree>
+  </p:cSld>
+  <p:clrMapOvr>
+    <a:masterClrMapping/>
+  </p:clrMapOvr>
+</p:notes>
+</file>
+
+<file path=ppt/notesSlides/notesSlide9.xml><?xml version="1.0" encoding="utf-8"?>
+<p:notes xmlns:a="http://schemas.openxmlformats.org/drawingml/2006/main" xmlns:p="http://schemas.openxmlformats.org/presentationml/2006/main" xmlns:r="http://schemas.openxmlformats.org/officeDocument/2006/relationships">
+  <p:cSld>
+    <p:spTree>
+      <p:nvGrpSpPr>
+        <p:cNvPr id="1" name=""/>
+        <p:cNvGrpSpPr/>
+        <p:nvPr/>
+      </p:nvGrpSpPr>
+      <p:grpSpPr>
+        <a:xfrm>
+          <a:off x="0" y="0"/>
+          <a:ext cx="0" cy="0"/>
+          <a:chOff x="0" y="0"/>
+          <a:chExt cx="0" cy="0"/>
+        </a:xfrm>
+      </p:grpSpPr>
+      <p:sp>
+        <p:nvSpPr>
+          <p:cNvPr id="2" name="Slide Image Placeholder 1"/>
+          <p:cNvSpPr>
+            <a:spLocks noGrp="1"/>
+          </p:cNvSpPr>
+          <p:nvPr>
+            <p:ph type="sldImg" idx="2"/>
+          </p:nvPr>
+        </p:nvSpPr>
+        <p:spPr/>
+      </p:sp>
+      <p:sp>
+        <p:nvSpPr>
+          <p:cNvPr id="3" name="Notes Placeholder 2"/>
+          <p:cNvSpPr>
+            <a:spLocks noGrp="1"/>
+          </p:cNvSpPr>
+          <p:nvPr>
+            <p:ph type="body" idx="3" sz="quarter"/>
+          </p:nvPr>
+        </p:nvSpPr>
+        <p:spPr/>
+        <p:txBody>
+          <a:bodyPr/>
+          <a:lstStyle/>
+          <a:p>
+            <a:r>
+              <a:t>実際にやってみましょう。</a:t>
+            </a:r>
+          </a:p>
+          <a:p/>
+          <a:p>
+            <a:r>
+              <a:t>（/initを実行して）こんな感じでCLAUDE.mdが生成されます。プロジェクトの構成や使っている技術を自動で検出してくれます。</a:t>
+            </a:r>
+          </a:p>
+          <a:p/>
+          <a:p>
+            <a:r>
+              <a:t>たとえばここに「Pythonを使う場合はuvを使う」というルールを追記しておくと、次回以降Claudeはpipではなくuvを使うようになります。</a:t>
+            </a:r>
+          </a:p>
+          <a:p/>
+          <a:p>
+            <a:r>
+              <a:t>こういう「教えておけば守ってくれる」のがCLAUDE.mdの威力です。</a:t>
+            </a:r>
+          </a:p>
+        </p:txBody>
+      </p:sp>
+      <p:sp>
+        <p:nvSpPr>
+          <p:cNvPr id="4" name="Slide Number Placeholder 3"/>
+          <p:cNvSpPr>
+            <a:spLocks noGrp="1"/>
+          </p:cNvSpPr>
+          <p:nvPr>
+            <p:ph type="sldNum" idx="5" sz="quarter"/>
+          </p:nvPr>
+        </p:nvSpPr>
+        <p:spPr/>
+      </p:sp>
+    </p:spTree>
+  </p:cSld>
+  <p:clrMapOvr>
+    <a:masterClrMapping/>
+  </p:clrMapOvr>
+</p:notes>
 </file>
 
 <file path=ppt/slideLayouts/slideLayout1.xml><?xml version="1.0" encoding="utf-8"?>
@@ -20724,4 +22750,324 @@
   </a:objectDefaults>
   <a:extraClrSchemeLst/>
 </a:theme>
+</file>
+
+<file path=ppt/theme/theme2.xml><?xml version="1.0" encoding="utf-8"?>
+<a:theme xmlns:a="http://schemas.openxmlformats.org/drawingml/2006/main" name="Office Theme">
+  <a:themeElements>
+    <a:clrScheme name="Office">
+      <a:dk1>
+        <a:sysClr val="windowText" lastClr="000000"/>
+      </a:dk1>
+      <a:lt1>
+        <a:sysClr val="window" lastClr="FFFFFF"/>
+      </a:lt1>
+      <a:dk2>
+        <a:srgbClr val="1F497D"/>
+      </a:dk2>
+      <a:lt2>
+        <a:srgbClr val="EEECE1"/>
+      </a:lt2>
+      <a:accent1>
+        <a:srgbClr val="4F81BD"/>
+      </a:accent1>
+      <a:accent2>
+        <a:srgbClr val="C0504D"/>
+      </a:accent2>
+      <a:accent3>
+        <a:srgbClr val="9BBB59"/>
+      </a:accent3>
+      <a:accent4>
+        <a:srgbClr val="8064A2"/>
+      </a:accent4>
+      <a:accent5>
+        <a:srgbClr val="4BACC6"/>
+      </a:accent5>
+      <a:accent6>
+        <a:srgbClr val="F79646"/>
+      </a:accent6>
+      <a:hlink>
+        <a:srgbClr val="0000FF"/>
+      </a:hlink>
+      <a:folHlink>
+        <a:srgbClr val="800080"/>
+      </a:folHlink>
+    </a:clrScheme>
+    <a:fontScheme name="Office">
+      <a:majorFont>
+        <a:latin typeface="Calibri"/>
+        <a:ea typeface=""/>
+        <a:cs typeface=""/>
+        <a:font script="Jpan" typeface="ＭＳ Ｐゴシック"/>
+        <a:font script="Hang" typeface="맑은 고딕"/>
+        <a:font script="Hans" typeface="宋体"/>
+        <a:font script="Hant" typeface="新細明體"/>
+        <a:font script="Arab" typeface="Times New Roman"/>
+        <a:font script="Hebr" typeface="Times New Roman"/>
+        <a:font script="Thai" typeface="Angsana New"/>
+        <a:font script="Ethi" typeface="Nyala"/>
+        <a:font script="Beng" typeface="Vrinda"/>
+        <a:font script="Gujr" typeface="Shruti"/>
+        <a:font script="Khmr" typeface="MoolBoran"/>
+        <a:font script="Knda" typeface="Tunga"/>
+        <a:font script="Guru" typeface="Raavi"/>
+        <a:font script="Cans" typeface="Euphemia"/>
+        <a:font script="Cher" typeface="Plantagenet Cherokee"/>
+        <a:font script="Yiii" typeface="Microsoft Yi Baiti"/>
+        <a:font script="Tibt" typeface="Microsoft Himalaya"/>
+        <a:font script="Thaa" typeface="MV Boli"/>
+        <a:font script="Deva" typeface="Mangal"/>
+        <a:font script="Telu" typeface="Gautami"/>
+        <a:font script="Taml" typeface="Latha"/>
+        <a:font script="Syrc" typeface="Estrangelo Edessa"/>
+        <a:font script="Orya" typeface="Kalinga"/>
+        <a:font script="Mlym" typeface="Kartika"/>
+        <a:font script="Laoo" typeface="DokChampa"/>
+        <a:font script="Sinh" typeface="Iskoola Pota"/>
+        <a:font script="Mong" typeface="Mongolian Baiti"/>
+        <a:font script="Viet" typeface="Times New Roman"/>
+        <a:font script="Uigh" typeface="Microsoft Uighur"/>
+        <a:font script="Geor" typeface="Sylfaen"/>
+      </a:majorFont>
+      <a:minorFont>
+        <a:latin typeface="Calibri"/>
+        <a:ea typeface=""/>
+        <a:cs typeface=""/>
+        <a:font script="Jpan" typeface="ＭＳ Ｐゴシック"/>
+        <a:font script="Hang" typeface="맑은 고딕"/>
+        <a:font script="Hans" typeface="宋体"/>
+        <a:font script="Hant" typeface="新細明體"/>
+        <a:font script="Arab" typeface="Arial"/>
+        <a:font script="Hebr" typeface="Arial"/>
+        <a:font script="Thai" typeface="Cordia New"/>
+        <a:font script="Ethi" typeface="Nyala"/>
+        <a:font script="Beng" typeface="Vrinda"/>
+        <a:font script="Gujr" typeface="Shruti"/>
+        <a:font script="Khmr" typeface="DaunPenh"/>
+        <a:font script="Knda" typeface="Tunga"/>
+        <a:font script="Guru" typeface="Raavi"/>
+        <a:font script="Cans" typeface="Euphemia"/>
+        <a:font script="Cher" typeface="Plantagenet Cherokee"/>
+        <a:font script="Yiii" typeface="Microsoft Yi Baiti"/>
+        <a:font script="Tibt" typeface="Microsoft Himalaya"/>
+        <a:font script="Thaa" typeface="MV Boli"/>
+        <a:font script="Deva" typeface="Mangal"/>
+        <a:font script="Telu" typeface="Gautami"/>
+        <a:font script="Taml" typeface="Latha"/>
+        <a:font script="Syrc" typeface="Estrangelo Edessa"/>
+        <a:font script="Orya" typeface="Kalinga"/>
+        <a:font script="Mlym" typeface="Kartika"/>
+        <a:font script="Laoo" typeface="DokChampa"/>
+        <a:font script="Sinh" typeface="Iskoola Pota"/>
+        <a:font script="Mong" typeface="Mongolian Baiti"/>
+        <a:font script="Viet" typeface="Arial"/>
+        <a:font script="Uigh" typeface="Microsoft Uighur"/>
+        <a:font script="Geor" typeface="Sylfaen"/>
+      </a:minorFont>
+    </a:fontScheme>
+    <a:fmtScheme name="Office">
+      <a:fillStyleLst>
+        <a:solidFill>
+          <a:schemeClr val="phClr"/>
+        </a:solidFill>
+        <a:gradFill rotWithShape="1">
+          <a:gsLst>
+            <a:gs pos="0">
+              <a:schemeClr val="phClr">
+                <a:tint val="50000"/>
+                <a:satMod val="300000"/>
+              </a:schemeClr>
+            </a:gs>
+            <a:gs pos="35000">
+              <a:schemeClr val="phClr">
+                <a:tint val="37000"/>
+                <a:satMod val="300000"/>
+              </a:schemeClr>
+            </a:gs>
+            <a:gs pos="100000">
+              <a:schemeClr val="phClr">
+                <a:tint val="15000"/>
+                <a:satMod val="350000"/>
+              </a:schemeClr>
+            </a:gs>
+          </a:gsLst>
+          <a:lin ang="16200000" scaled="1"/>
+        </a:gradFill>
+        <a:gradFill rotWithShape="1">
+          <a:gsLst>
+            <a:gs pos="0">
+              <a:schemeClr val="phClr">
+                <a:tint val="100000"/>
+                <a:shade val="100000"/>
+                <a:satMod val="130000"/>
+              </a:schemeClr>
+            </a:gs>
+            <a:gs pos="100000">
+              <a:schemeClr val="phClr">
+                <a:tint val="50000"/>
+                <a:shade val="100000"/>
+                <a:satMod val="350000"/>
+              </a:schemeClr>
+            </a:gs>
+          </a:gsLst>
+          <a:lin ang="16200000" scaled="0"/>
+        </a:gradFill>
+      </a:fillStyleLst>
+      <a:lnStyleLst>
+        <a:ln w="9525" cap="flat" cmpd="sng" algn="ctr">
+          <a:solidFill>
+            <a:schemeClr val="phClr">
+              <a:shade val="95000"/>
+              <a:satMod val="105000"/>
+            </a:schemeClr>
+          </a:solidFill>
+          <a:prstDash val="solid"/>
+        </a:ln>
+        <a:ln w="25400" cap="flat" cmpd="sng" algn="ctr">
+          <a:solidFill>
+            <a:schemeClr val="phClr"/>
+          </a:solidFill>
+          <a:prstDash val="solid"/>
+        </a:ln>
+        <a:ln w="38100" cap="flat" cmpd="sng" algn="ctr">
+          <a:solidFill>
+            <a:schemeClr val="phClr"/>
+          </a:solidFill>
+          <a:prstDash val="solid"/>
+        </a:ln>
+      </a:lnStyleLst>
+      <a:effectStyleLst>
+        <a:effectStyle>
+          <a:effectLst>
+            <a:outerShdw blurRad="40000" dist="20000" dir="5400000" rotWithShape="0">
+              <a:srgbClr val="000000">
+                <a:alpha val="38000"/>
+              </a:srgbClr>
+            </a:outerShdw>
+          </a:effectLst>
+        </a:effectStyle>
+        <a:effectStyle>
+          <a:effectLst>
+            <a:outerShdw blurRad="40000" dist="23000" dir="5400000" rotWithShape="0">
+              <a:srgbClr val="000000">
+                <a:alpha val="35000"/>
+              </a:srgbClr>
+            </a:outerShdw>
+          </a:effectLst>
+        </a:effectStyle>
+        <a:effectStyle>
+          <a:effectLst>
+            <a:outerShdw blurRad="40000" dist="23000" dir="5400000" rotWithShape="0">
+              <a:srgbClr val="000000">
+                <a:alpha val="35000"/>
+              </a:srgbClr>
+            </a:outerShdw>
+          </a:effectLst>
+          <a:scene3d>
+            <a:camera prst="orthographicFront">
+              <a:rot lat="0" lon="0" rev="0"/>
+            </a:camera>
+            <a:lightRig rig="threePt" dir="t">
+              <a:rot lat="0" lon="0" rev="1200000"/>
+            </a:lightRig>
+          </a:scene3d>
+          <a:sp3d>
+            <a:bevelT w="63500" h="25400"/>
+          </a:sp3d>
+        </a:effectStyle>
+      </a:effectStyleLst>
+      <a:bgFillStyleLst>
+        <a:solidFill>
+          <a:schemeClr val="phClr"/>
+        </a:solidFill>
+        <a:gradFill rotWithShape="1">
+          <a:gsLst>
+            <a:gs pos="0">
+              <a:schemeClr val="phClr">
+                <a:tint val="40000"/>
+                <a:satMod val="350000"/>
+              </a:schemeClr>
+            </a:gs>
+            <a:gs pos="40000">
+              <a:schemeClr val="phClr">
+                <a:tint val="45000"/>
+                <a:shade val="99000"/>
+                <a:satMod val="350000"/>
+              </a:schemeClr>
+            </a:gs>
+            <a:gs pos="100000">
+              <a:schemeClr val="phClr">
+                <a:shade val="20000"/>
+                <a:satMod val="255000"/>
+              </a:schemeClr>
+            </a:gs>
+          </a:gsLst>
+          <a:path path="circle">
+            <a:fillToRect l="50000" t="-80000" r="50000" b="180000"/>
+          </a:path>
+        </a:gradFill>
+        <a:gradFill rotWithShape="1">
+          <a:gsLst>
+            <a:gs pos="0">
+              <a:schemeClr val="phClr">
+                <a:tint val="80000"/>
+                <a:satMod val="300000"/>
+              </a:schemeClr>
+            </a:gs>
+            <a:gs pos="100000">
+              <a:schemeClr val="phClr">
+                <a:shade val="30000"/>
+                <a:satMod val="200000"/>
+              </a:schemeClr>
+            </a:gs>
+          </a:gsLst>
+          <a:path path="circle">
+            <a:fillToRect l="50000" t="50000" r="50000" b="50000"/>
+          </a:path>
+        </a:gradFill>
+      </a:bgFillStyleLst>
+    </a:fmtScheme>
+  </a:themeElements>
+  <a:objectDefaults>
+    <a:spDef>
+      <a:spPr/>
+      <a:bodyPr/>
+      <a:lstStyle/>
+      <a:style>
+        <a:lnRef idx="1">
+          <a:schemeClr val="accent1"/>
+        </a:lnRef>
+        <a:fillRef idx="3">
+          <a:schemeClr val="accent1"/>
+        </a:fillRef>
+        <a:effectRef idx="2">
+          <a:schemeClr val="accent1"/>
+        </a:effectRef>
+        <a:fontRef idx="minor">
+          <a:schemeClr val="lt1"/>
+        </a:fontRef>
+      </a:style>
+    </a:spDef>
+    <a:lnDef>
+      <a:spPr/>
+      <a:bodyPr/>
+      <a:lstStyle/>
+      <a:style>
+        <a:lnRef idx="2">
+          <a:schemeClr val="accent1"/>
+        </a:lnRef>
+        <a:fillRef idx="0">
+          <a:schemeClr val="accent1"/>
+        </a:fillRef>
+        <a:effectRef idx="1">
+          <a:schemeClr val="accent1"/>
+        </a:effectRef>
+        <a:fontRef idx="minor">
+          <a:schemeClr val="tx1"/>
+        </a:fontRef>
+      </a:style>
+    </a:lnDef>
+  </a:objectDefaults>
+  <a:extraClrSchemeLst/>
+</a:theme>
 </file>